--- a/feature-slice/09b-document-report-generation/document-report-generation.pptx
+++ b/feature-slice/09b-document-report-generation/document-report-generation.pptx
@@ -5,14 +5,13 @@
     <p:sldMasterId id="2147483648" r:id="rId1"/>
   </p:sldMasterIdLst>
   <p:notesMasterIdLst>
-    <p:notesMasterId r:id="rId4"/>
+    <p:notesMasterId r:id="rId3"/>
   </p:notesMasterIdLst>
   <p:handoutMasterIdLst>
-    <p:handoutMasterId r:id="rId5"/>
+    <p:handoutMasterId r:id="rId4"/>
   </p:handoutMasterIdLst>
   <p:sldIdLst>
-    <p:sldId id="313" r:id="rId2"/>
-    <p:sldId id="317" r:id="rId3"/>
+    <p:sldId id="317" r:id="rId2"/>
   </p:sldIdLst>
   <p:sldSz cx="12192000" cy="6858000"/>
   <p:notesSz cx="6858000" cy="9144000"/>
@@ -1768,1033 +1767,6 @@
   <p:cSld>
     <p:spTree>
       <p:nvGrpSpPr>
-        <p:cNvPr id="1" name=""/>
-        <p:cNvGrpSpPr/>
-        <p:nvPr/>
-      </p:nvGrpSpPr>
-      <p:grpSpPr>
-        <a:xfrm>
-          <a:off x="0" y="0"/>
-          <a:ext cx="0" cy="0"/>
-          <a:chOff x="0" y="0"/>
-          <a:chExt cx="0" cy="0"/>
-        </a:xfrm>
-      </p:grpSpPr>
-      <p:sp>
-        <p:nvSpPr>
-          <p:cNvPr id="4" name="CICD"/>
-          <p:cNvSpPr/>
-          <p:nvPr/>
-        </p:nvSpPr>
-        <p:spPr>
-          <a:xfrm>
-            <a:off x="2406650" y="5462356"/>
-            <a:ext cx="7378700" cy="666750"/>
-          </a:xfrm>
-          <a:prstGeom prst="rect">
-            <a:avLst/>
-          </a:prstGeom>
-          <a:noFill/>
-          <a:ln/>
-        </p:spPr>
-        <p:txBody>
-          <a:bodyPr wrap="square" lIns="0" tIns="0" rIns="0" bIns="0" rtlCol="0" anchor="t"/>
-          <a:lstStyle/>
-          <a:p>
-            <a:pPr algn="ctr">
-              <a:lnSpc>
-                <a:spcPct val="133333"/>
-              </a:lnSpc>
-            </a:pPr>
-            <a:endParaRPr lang="en-US" sz="1100" dirty="0">
-              <a:latin typeface="Pretendard SemiBold" panose="02000703000000020004" pitchFamily="50" charset="-127"/>
-              <a:ea typeface="Pretendard SemiBold" panose="02000703000000020004" pitchFamily="50" charset="-127"/>
-              <a:cs typeface="Pretendard SemiBold" panose="02000703000000020004" pitchFamily="50" charset="-127"/>
-            </a:endParaRPr>
-          </a:p>
-        </p:txBody>
-      </p:sp>
-      <p:sp>
-        <p:nvSpPr>
-          <p:cNvPr id="5" name="CICD"/>
-          <p:cNvSpPr/>
-          <p:nvPr/>
-        </p:nvSpPr>
-        <p:spPr>
-          <a:xfrm>
-            <a:off x="2406650" y="5427865"/>
-            <a:ext cx="7378700" cy="885129"/>
-          </a:xfrm>
-          <a:prstGeom prst="rect">
-            <a:avLst/>
-          </a:prstGeom>
-          <a:noFill/>
-          <a:ln/>
-        </p:spPr>
-        <p:txBody>
-          <a:bodyPr wrap="square" lIns="0" tIns="0" rIns="0" bIns="0" rtlCol="0" anchor="ctr"/>
-          <a:lstStyle/>
-          <a:p>
-            <a:pPr algn="ctr">
-              <a:lnSpc>
-                <a:spcPct val="150000"/>
-              </a:lnSpc>
-            </a:pPr>
-            <a:endParaRPr lang="en-US" altLang="ko-KR" sz="1100" dirty="0">
-              <a:latin typeface="Pretendard SemiBold" panose="02000703000000020004" pitchFamily="50" charset="-127"/>
-              <a:ea typeface="Pretendard SemiBold" panose="02000703000000020004" pitchFamily="50" charset="-127"/>
-              <a:cs typeface="Pretendard SemiBold" panose="02000703000000020004" pitchFamily="50" charset="-127"/>
-            </a:endParaRPr>
-          </a:p>
-        </p:txBody>
-      </p:sp>
-      <p:grpSp>
-        <p:nvGrpSpPr>
-          <p:cNvPr id="6" name="그룹 5">
-            <a:extLst>
-              <a:ext uri="{FF2B5EF4-FFF2-40B4-BE49-F238E27FC236}">
-                <a16:creationId xmlns:a16="http://schemas.microsoft.com/office/drawing/2014/main" id="{1773C09A-468D-E7AE-9696-83405B30E197}"/>
-              </a:ext>
-            </a:extLst>
-          </p:cNvPr>
-          <p:cNvGrpSpPr/>
-          <p:nvPr/>
-        </p:nvGrpSpPr>
-        <p:grpSpPr>
-          <a:xfrm>
-            <a:off x="2680643" y="913922"/>
-            <a:ext cx="6830715" cy="4230599"/>
-            <a:chOff x="2686508" y="976066"/>
-            <a:chExt cx="6830715" cy="4230599"/>
-          </a:xfrm>
-        </p:grpSpPr>
-        <p:sp>
-          <p:nvSpPr>
-            <p:cNvPr id="7" name="직사각형 6">
-              <a:extLst>
-                <a:ext uri="{FF2B5EF4-FFF2-40B4-BE49-F238E27FC236}">
-                  <a16:creationId xmlns:a16="http://schemas.microsoft.com/office/drawing/2014/main" id="{AD99BA65-5DAF-7FC6-3F27-EB805F92AC1E}"/>
-                </a:ext>
-              </a:extLst>
-            </p:cNvPr>
-            <p:cNvSpPr/>
-            <p:nvPr/>
-          </p:nvSpPr>
-          <p:spPr>
-            <a:xfrm>
-              <a:off x="2686508" y="976066"/>
-              <a:ext cx="6830715" cy="4230599"/>
-            </a:xfrm>
-            <a:prstGeom prst="rect">
-              <a:avLst/>
-            </a:prstGeom>
-            <a:solidFill>
-              <a:schemeClr val="accent1">
-                <a:lumMod val="20000"/>
-                <a:lumOff val="80000"/>
-                <a:alpha val="35000"/>
-              </a:schemeClr>
-            </a:solidFill>
-            <a:ln>
-              <a:noFill/>
-            </a:ln>
-            <a:effectLst>
-              <a:softEdge rad="12700"/>
-            </a:effectLst>
-          </p:spPr>
-          <p:style>
-            <a:lnRef idx="2">
-              <a:schemeClr val="accent1">
-                <a:shade val="50000"/>
-              </a:schemeClr>
-            </a:lnRef>
-            <a:fillRef idx="1">
-              <a:schemeClr val="accent1"/>
-            </a:fillRef>
-            <a:effectRef idx="0">
-              <a:schemeClr val="accent1"/>
-            </a:effectRef>
-            <a:fontRef idx="minor">
-              <a:schemeClr val="lt1"/>
-            </a:fontRef>
-          </p:style>
-          <p:txBody>
-            <a:bodyPr rtlCol="0" anchor="t"/>
-            <a:lstStyle/>
-            <a:p>
-              <a:pPr algn="ctr"/>
-              <a:r>
-                <a:rPr lang="en-US" altLang="ko-KR" sz="1200" dirty="0">
-                  <a:solidFill>
-                    <a:schemeClr val="tx1">
-                      <a:lumMod val="85000"/>
-                      <a:lumOff val="15000"/>
-                    </a:schemeClr>
-                  </a:solidFill>
-                  <a:latin typeface="Pretendard SemiBold" panose="02000703000000020004" pitchFamily="50" charset="-127"/>
-                  <a:ea typeface="Pretendard SemiBold" panose="02000703000000020004" pitchFamily="50" charset="-127"/>
-                  <a:cs typeface="Pretendard SemiBold" panose="02000703000000020004" pitchFamily="50" charset="-127"/>
-                </a:rPr>
-                <a:t>CORE</a:t>
-              </a:r>
-              <a:endParaRPr lang="ko-KR" altLang="en-US" sz="1200" dirty="0">
-                <a:solidFill>
-                  <a:schemeClr val="tx1">
-                    <a:lumMod val="85000"/>
-                    <a:lumOff val="15000"/>
-                  </a:schemeClr>
-                </a:solidFill>
-                <a:latin typeface="Pretendard SemiBold" panose="02000703000000020004" pitchFamily="50" charset="-127"/>
-                <a:ea typeface="Pretendard SemiBold" panose="02000703000000020004" pitchFamily="50" charset="-127"/>
-                <a:cs typeface="Pretendard SemiBold" panose="02000703000000020004" pitchFamily="50" charset="-127"/>
-              </a:endParaRPr>
-            </a:p>
-          </p:txBody>
-        </p:sp>
-        <p:sp>
-          <p:nvSpPr>
-            <p:cNvPr id="8" name="직사각형 7">
-              <a:extLst>
-                <a:ext uri="{FF2B5EF4-FFF2-40B4-BE49-F238E27FC236}">
-                  <a16:creationId xmlns:a16="http://schemas.microsoft.com/office/drawing/2014/main" id="{15F07289-013A-FA33-EBF9-2BC0DFED4F65}"/>
-                </a:ext>
-              </a:extLst>
-            </p:cNvPr>
-            <p:cNvSpPr/>
-            <p:nvPr/>
-          </p:nvSpPr>
-          <p:spPr>
-            <a:xfrm>
-              <a:off x="5308307" y="3587630"/>
-              <a:ext cx="3139749" cy="1470580"/>
-            </a:xfrm>
-            <a:prstGeom prst="rect">
-              <a:avLst/>
-            </a:prstGeom>
-            <a:solidFill>
-              <a:schemeClr val="bg2">
-                <a:lumMod val="90000"/>
-                <a:alpha val="40000"/>
-              </a:schemeClr>
-            </a:solidFill>
-            <a:ln w="12700">
-              <a:noFill/>
-            </a:ln>
-            <a:effectLst>
-              <a:softEdge rad="12700"/>
-            </a:effectLst>
-          </p:spPr>
-          <p:style>
-            <a:lnRef idx="2">
-              <a:schemeClr val="accent1">
-                <a:shade val="50000"/>
-              </a:schemeClr>
-            </a:lnRef>
-            <a:fillRef idx="1">
-              <a:schemeClr val="accent1"/>
-            </a:fillRef>
-            <a:effectRef idx="0">
-              <a:schemeClr val="accent1"/>
-            </a:effectRef>
-            <a:fontRef idx="minor">
-              <a:schemeClr val="lt1"/>
-            </a:fontRef>
-          </p:style>
-          <p:txBody>
-            <a:bodyPr rtlCol="0" anchor="t"/>
-            <a:lstStyle/>
-            <a:p>
-              <a:pPr algn="ctr"/>
-              <a:r>
-                <a:rPr lang="en-US" altLang="ko-KR" sz="1100" b="1" dirty="0">
-                  <a:solidFill>
-                    <a:schemeClr val="tx1">
-                      <a:lumMod val="85000"/>
-                      <a:lumOff val="15000"/>
-                    </a:schemeClr>
-                  </a:solidFill>
-                  <a:latin typeface="Pretendard SemiBold" panose="02000703000000020004" pitchFamily="50" charset="-127"/>
-                  <a:ea typeface="Pretendard SemiBold" panose="02000703000000020004" pitchFamily="50" charset="-127"/>
-                  <a:cs typeface="Pretendard SemiBold" panose="02000703000000020004" pitchFamily="50" charset="-127"/>
-                </a:rPr>
-                <a:t>System Meta</a:t>
-              </a:r>
-            </a:p>
-          </p:txBody>
-        </p:sp>
-        <p:sp>
-          <p:nvSpPr>
-            <p:cNvPr id="9" name="직사각형 8">
-              <a:extLst>
-                <a:ext uri="{FF2B5EF4-FFF2-40B4-BE49-F238E27FC236}">
-                  <a16:creationId xmlns:a16="http://schemas.microsoft.com/office/drawing/2014/main" id="{15F07289-013A-FA33-EBF9-2BC0DFED4F65}"/>
-                </a:ext>
-              </a:extLst>
-            </p:cNvPr>
-            <p:cNvSpPr/>
-            <p:nvPr/>
-          </p:nvSpPr>
-          <p:spPr>
-            <a:xfrm>
-              <a:off x="5308307" y="1358914"/>
-              <a:ext cx="3139749" cy="2086255"/>
-            </a:xfrm>
-            <a:prstGeom prst="rect">
-              <a:avLst/>
-            </a:prstGeom>
-            <a:solidFill>
-              <a:schemeClr val="accent1">
-                <a:lumMod val="40000"/>
-                <a:lumOff val="60000"/>
-                <a:alpha val="40000"/>
-              </a:schemeClr>
-            </a:solidFill>
-            <a:ln w="12700">
-              <a:noFill/>
-            </a:ln>
-            <a:effectLst>
-              <a:softEdge rad="12700"/>
-            </a:effectLst>
-          </p:spPr>
-          <p:style>
-            <a:lnRef idx="2">
-              <a:schemeClr val="accent1">
-                <a:shade val="50000"/>
-              </a:schemeClr>
-            </a:lnRef>
-            <a:fillRef idx="1">
-              <a:schemeClr val="accent1"/>
-            </a:fillRef>
-            <a:effectRef idx="0">
-              <a:schemeClr val="accent1"/>
-            </a:effectRef>
-            <a:fontRef idx="minor">
-              <a:schemeClr val="lt1"/>
-            </a:fontRef>
-          </p:style>
-          <p:txBody>
-            <a:bodyPr rtlCol="0" anchor="t"/>
-            <a:lstStyle/>
-            <a:p>
-              <a:pPr algn="ctr"/>
-              <a:r>
-                <a:rPr lang="en-US" altLang="ko-KR" sz="1100" b="1" dirty="0">
-                  <a:solidFill>
-                    <a:schemeClr val="tx1">
-                      <a:lumMod val="85000"/>
-                      <a:lumOff val="15000"/>
-                    </a:schemeClr>
-                  </a:solidFill>
-                  <a:latin typeface="Pretendard SemiBold" panose="02000703000000020004" pitchFamily="50" charset="-127"/>
-                  <a:ea typeface="Pretendard SemiBold" panose="02000703000000020004" pitchFamily="50" charset="-127"/>
-                  <a:cs typeface="Pretendard SemiBold" panose="02000703000000020004" pitchFamily="50" charset="-127"/>
-                </a:rPr>
-                <a:t>Patch Manager</a:t>
-              </a:r>
-            </a:p>
-          </p:txBody>
-        </p:sp>
-        <p:sp>
-          <p:nvSpPr>
-            <p:cNvPr id="10" name="직사각형 9">
-              <a:extLst>
-                <a:ext uri="{FF2B5EF4-FFF2-40B4-BE49-F238E27FC236}">
-                  <a16:creationId xmlns:a16="http://schemas.microsoft.com/office/drawing/2014/main" id="{5808C6C3-9339-FB27-D784-3BDF80F90D2D}"/>
-                </a:ext>
-              </a:extLst>
-            </p:cNvPr>
-            <p:cNvSpPr/>
-            <p:nvPr/>
-          </p:nvSpPr>
-          <p:spPr>
-            <a:xfrm>
-              <a:off x="3427082" y="1379126"/>
-              <a:ext cx="1331225" cy="2054908"/>
-            </a:xfrm>
-            <a:prstGeom prst="rect">
-              <a:avLst/>
-            </a:prstGeom>
-            <a:solidFill>
-              <a:schemeClr val="accent4">
-                <a:lumMod val="20000"/>
-                <a:lumOff val="80000"/>
-                <a:alpha val="35000"/>
-              </a:schemeClr>
-            </a:solidFill>
-            <a:ln>
-              <a:noFill/>
-            </a:ln>
-            <a:effectLst>
-              <a:softEdge rad="31750"/>
-            </a:effectLst>
-          </p:spPr>
-          <p:style>
-            <a:lnRef idx="2">
-              <a:schemeClr val="accent1">
-                <a:shade val="50000"/>
-              </a:schemeClr>
-            </a:lnRef>
-            <a:fillRef idx="1">
-              <a:schemeClr val="accent1"/>
-            </a:fillRef>
-            <a:effectRef idx="0">
-              <a:schemeClr val="accent1"/>
-            </a:effectRef>
-            <a:fontRef idx="minor">
-              <a:schemeClr val="lt1"/>
-            </a:fontRef>
-          </p:style>
-          <p:txBody>
-            <a:bodyPr rtlCol="0" anchor="t"/>
-            <a:lstStyle/>
-            <a:p>
-              <a:pPr algn="ctr"/>
-              <a:r>
-                <a:rPr lang="en-US" altLang="ko-KR" sz="1100" b="1" dirty="0">
-                  <a:solidFill>
-                    <a:schemeClr val="tx1">
-                      <a:lumMod val="85000"/>
-                      <a:lumOff val="15000"/>
-                    </a:schemeClr>
-                  </a:solidFill>
-                  <a:latin typeface="Pretendard SemiBold" panose="02000703000000020004" pitchFamily="50" charset="-127"/>
-                  <a:ea typeface="Pretendard SemiBold" panose="02000703000000020004" pitchFamily="50" charset="-127"/>
-                  <a:cs typeface="Pretendard SemiBold" panose="02000703000000020004" pitchFamily="50" charset="-127"/>
-                </a:rPr>
-                <a:t>Client</a:t>
-              </a:r>
-              <a:endParaRPr lang="ko-KR" altLang="en-US" sz="1100" b="1" dirty="0">
-                <a:solidFill>
-                  <a:schemeClr val="tx1">
-                    <a:lumMod val="85000"/>
-                    <a:lumOff val="15000"/>
-                  </a:schemeClr>
-                </a:solidFill>
-                <a:latin typeface="Pretendard SemiBold" panose="02000703000000020004" pitchFamily="50" charset="-127"/>
-                <a:ea typeface="Pretendard SemiBold" panose="02000703000000020004" pitchFamily="50" charset="-127"/>
-                <a:cs typeface="Pretendard SemiBold" panose="02000703000000020004" pitchFamily="50" charset="-127"/>
-              </a:endParaRPr>
-            </a:p>
-          </p:txBody>
-        </p:sp>
-        <p:sp>
-          <p:nvSpPr>
-            <p:cNvPr id="11" name="직사각형 10">
-              <a:extLst>
-                <a:ext uri="{FF2B5EF4-FFF2-40B4-BE49-F238E27FC236}">
-                  <a16:creationId xmlns:a16="http://schemas.microsoft.com/office/drawing/2014/main" id="{C8A7CCDD-3C0C-5A56-9F28-C6D98BE1145B}"/>
-                </a:ext>
-              </a:extLst>
-            </p:cNvPr>
-            <p:cNvSpPr/>
-            <p:nvPr/>
-          </p:nvSpPr>
-          <p:spPr>
-            <a:xfrm>
-              <a:off x="3602246" y="2230488"/>
-              <a:ext cx="992468" cy="471409"/>
-            </a:xfrm>
-            <a:prstGeom prst="rect">
-              <a:avLst/>
-            </a:prstGeom>
-            <a:solidFill>
-              <a:schemeClr val="accent4">
-                <a:lumMod val="40000"/>
-                <a:lumOff val="60000"/>
-                <a:alpha val="40000"/>
-              </a:schemeClr>
-            </a:solidFill>
-            <a:ln>
-              <a:solidFill>
-                <a:schemeClr val="tx1"/>
-              </a:solidFill>
-            </a:ln>
-            <a:effectLst>
-              <a:softEdge rad="0"/>
-            </a:effectLst>
-          </p:spPr>
-          <p:style>
-            <a:lnRef idx="2">
-              <a:schemeClr val="accent1">
-                <a:shade val="50000"/>
-              </a:schemeClr>
-            </a:lnRef>
-            <a:fillRef idx="1">
-              <a:schemeClr val="accent1"/>
-            </a:fillRef>
-            <a:effectRef idx="0">
-              <a:schemeClr val="accent1"/>
-            </a:effectRef>
-            <a:fontRef idx="minor">
-              <a:schemeClr val="lt1"/>
-            </a:fontRef>
-          </p:style>
-          <p:txBody>
-            <a:bodyPr rtlCol="0" anchor="ctr"/>
-            <a:lstStyle/>
-            <a:p>
-              <a:pPr algn="ctr"/>
-              <a:r>
-                <a:rPr lang="en-US" altLang="ko-KR" sz="1050" dirty="0">
-                  <a:solidFill>
-                    <a:schemeClr val="tx1"/>
-                  </a:solidFill>
-                  <a:latin typeface="Pretendard SemiBold" panose="02000703000000020004" pitchFamily="50" charset="-127"/>
-                  <a:ea typeface="Pretendard SemiBold" panose="02000703000000020004" pitchFamily="50" charset="-127"/>
-                  <a:cs typeface="Pretendard SemiBold" panose="02000703000000020004" pitchFamily="50" charset="-127"/>
-                </a:rPr>
-                <a:t>Web Console</a:t>
-              </a:r>
-              <a:endParaRPr lang="ko-KR" altLang="en-US" sz="1050" dirty="0">
-                <a:solidFill>
-                  <a:schemeClr val="tx1"/>
-                </a:solidFill>
-                <a:latin typeface="Pretendard SemiBold" panose="02000703000000020004" pitchFamily="50" charset="-127"/>
-                <a:ea typeface="Pretendard SemiBold" panose="02000703000000020004" pitchFamily="50" charset="-127"/>
-                <a:cs typeface="Pretendard SemiBold" panose="02000703000000020004" pitchFamily="50" charset="-127"/>
-              </a:endParaRPr>
-            </a:p>
-          </p:txBody>
-        </p:sp>
-        <p:sp>
-          <p:nvSpPr>
-            <p:cNvPr id="12" name="원통 11">
-              <a:extLst>
-                <a:ext uri="{FF2B5EF4-FFF2-40B4-BE49-F238E27FC236}">
-                  <a16:creationId xmlns:a16="http://schemas.microsoft.com/office/drawing/2014/main" id="{F705EAAC-2F42-A97F-290D-E026A423D1FD}"/>
-                </a:ext>
-              </a:extLst>
-            </p:cNvPr>
-            <p:cNvSpPr/>
-            <p:nvPr/>
-          </p:nvSpPr>
-          <p:spPr>
-            <a:xfrm>
-              <a:off x="6030713" y="4041269"/>
-              <a:ext cx="709127" cy="670700"/>
-            </a:xfrm>
-            <a:prstGeom prst="can">
-              <a:avLst/>
-            </a:prstGeom>
-            <a:solidFill>
-              <a:schemeClr val="bg2">
-                <a:lumMod val="90000"/>
-              </a:schemeClr>
-            </a:solidFill>
-            <a:ln>
-              <a:solidFill>
-                <a:schemeClr val="tx1"/>
-              </a:solidFill>
-            </a:ln>
-          </p:spPr>
-          <p:style>
-            <a:lnRef idx="2">
-              <a:schemeClr val="accent1">
-                <a:shade val="50000"/>
-              </a:schemeClr>
-            </a:lnRef>
-            <a:fillRef idx="1">
-              <a:schemeClr val="accent1"/>
-            </a:fillRef>
-            <a:effectRef idx="0">
-              <a:schemeClr val="accent1"/>
-            </a:effectRef>
-            <a:fontRef idx="minor">
-              <a:schemeClr val="lt1"/>
-            </a:fontRef>
-          </p:style>
-          <p:txBody>
-            <a:bodyPr rtlCol="0" anchor="ctr"/>
-            <a:lstStyle/>
-            <a:p>
-              <a:pPr algn="ctr"/>
-              <a:r>
-                <a:rPr lang="en-US" altLang="ko-KR" sz="1050" dirty="0">
-                  <a:solidFill>
-                    <a:schemeClr val="tx1"/>
-                  </a:solidFill>
-                  <a:latin typeface="Pretendard SemiBold" panose="02000703000000020004" pitchFamily="50" charset="-127"/>
-                  <a:ea typeface="Pretendard SemiBold" panose="02000703000000020004" pitchFamily="50" charset="-127"/>
-                  <a:cs typeface="Pretendard SemiBold" panose="02000703000000020004" pitchFamily="50" charset="-127"/>
-                </a:rPr>
-                <a:t>Task Meta</a:t>
-              </a:r>
-              <a:endParaRPr lang="ko-KR" altLang="en-US" sz="1050" dirty="0">
-                <a:solidFill>
-                  <a:schemeClr val="tx1"/>
-                </a:solidFill>
-                <a:latin typeface="Pretendard SemiBold" panose="02000703000000020004" pitchFamily="50" charset="-127"/>
-                <a:ea typeface="Pretendard SemiBold" panose="02000703000000020004" pitchFamily="50" charset="-127"/>
-                <a:cs typeface="Pretendard SemiBold" panose="02000703000000020004" pitchFamily="50" charset="-127"/>
-              </a:endParaRPr>
-            </a:p>
-          </p:txBody>
-        </p:sp>
-        <p:sp>
-          <p:nvSpPr>
-            <p:cNvPr id="13" name="직사각형 12"/>
-            <p:cNvSpPr/>
-            <p:nvPr/>
-          </p:nvSpPr>
-          <p:spPr>
-            <a:xfrm>
-              <a:off x="5576670" y="2221643"/>
-              <a:ext cx="2590027" cy="471409"/>
-            </a:xfrm>
-            <a:prstGeom prst="rect">
-              <a:avLst/>
-            </a:prstGeom>
-            <a:solidFill>
-              <a:schemeClr val="accent1">
-                <a:lumMod val="40000"/>
-                <a:lumOff val="60000"/>
-              </a:schemeClr>
-            </a:solidFill>
-            <a:ln>
-              <a:solidFill>
-                <a:schemeClr val="tx1"/>
-              </a:solidFill>
-            </a:ln>
-          </p:spPr>
-          <p:style>
-            <a:lnRef idx="2">
-              <a:schemeClr val="accent1">
-                <a:shade val="50000"/>
-              </a:schemeClr>
-            </a:lnRef>
-            <a:fillRef idx="1">
-              <a:schemeClr val="accent1"/>
-            </a:fillRef>
-            <a:effectRef idx="0">
-              <a:schemeClr val="accent1"/>
-            </a:effectRef>
-            <a:fontRef idx="minor">
-              <a:schemeClr val="lt1"/>
-            </a:fontRef>
-          </p:style>
-          <p:txBody>
-            <a:bodyPr rtlCol="0" anchor="ctr"/>
-            <a:lstStyle/>
-            <a:p>
-              <a:pPr algn="ctr"/>
-              <a:r>
-                <a:rPr lang="en-US" altLang="ko-KR" sz="1050" dirty="0">
-                  <a:solidFill>
-                    <a:schemeClr val="tx1"/>
-                  </a:solidFill>
-                  <a:latin typeface="Pretendard SemiBold" panose="02000703000000020004" pitchFamily="50" charset="-127"/>
-                  <a:ea typeface="Pretendard SemiBold" panose="02000703000000020004" pitchFamily="50" charset="-127"/>
-                  <a:cs typeface="Pretendard SemiBold" panose="02000703000000020004" pitchFamily="50" charset="-127"/>
-                </a:rPr>
-                <a:t>Task Service</a:t>
-              </a:r>
-              <a:endParaRPr lang="ko-KR" altLang="en-US" sz="1050" dirty="0">
-                <a:solidFill>
-                  <a:schemeClr val="tx1"/>
-                </a:solidFill>
-                <a:latin typeface="Pretendard SemiBold" panose="02000703000000020004" pitchFamily="50" charset="-127"/>
-                <a:ea typeface="Pretendard SemiBold" panose="02000703000000020004" pitchFamily="50" charset="-127"/>
-                <a:cs typeface="Pretendard SemiBold" panose="02000703000000020004" pitchFamily="50" charset="-127"/>
-              </a:endParaRPr>
-            </a:p>
-          </p:txBody>
-        </p:sp>
-        <p:sp>
-          <p:nvSpPr>
-            <p:cNvPr id="14" name="원통 13">
-              <a:extLst>
-                <a:ext uri="{FF2B5EF4-FFF2-40B4-BE49-F238E27FC236}">
-                  <a16:creationId xmlns:a16="http://schemas.microsoft.com/office/drawing/2014/main" id="{F705EAAC-2F42-A97F-290D-E026A423D1FD}"/>
-                </a:ext>
-              </a:extLst>
-            </p:cNvPr>
-            <p:cNvSpPr/>
-            <p:nvPr/>
-          </p:nvSpPr>
-          <p:spPr>
-            <a:xfrm>
-              <a:off x="6995224" y="4048769"/>
-              <a:ext cx="709127" cy="674277"/>
-            </a:xfrm>
-            <a:prstGeom prst="can">
-              <a:avLst/>
-            </a:prstGeom>
-            <a:solidFill>
-              <a:schemeClr val="bg2">
-                <a:lumMod val="90000"/>
-              </a:schemeClr>
-            </a:solidFill>
-            <a:ln>
-              <a:solidFill>
-                <a:schemeClr val="tx1"/>
-              </a:solidFill>
-            </a:ln>
-          </p:spPr>
-          <p:style>
-            <a:lnRef idx="2">
-              <a:schemeClr val="accent1">
-                <a:shade val="50000"/>
-              </a:schemeClr>
-            </a:lnRef>
-            <a:fillRef idx="1">
-              <a:schemeClr val="accent1"/>
-            </a:fillRef>
-            <a:effectRef idx="0">
-              <a:schemeClr val="accent1"/>
-            </a:effectRef>
-            <a:fontRef idx="minor">
-              <a:schemeClr val="lt1"/>
-            </a:fontRef>
-          </p:style>
-          <p:txBody>
-            <a:bodyPr rtlCol="0" anchor="ctr"/>
-            <a:lstStyle/>
-            <a:p>
-              <a:pPr algn="ctr"/>
-              <a:r>
-                <a:rPr lang="en-US" altLang="ko-KR" sz="1050" dirty="0">
-                  <a:solidFill>
-                    <a:schemeClr val="tx1"/>
-                  </a:solidFill>
-                  <a:latin typeface="Pretendard SemiBold" panose="02000703000000020004" pitchFamily="50" charset="-127"/>
-                  <a:ea typeface="Pretendard SemiBold" panose="02000703000000020004" pitchFamily="50" charset="-127"/>
-                  <a:cs typeface="Pretendard SemiBold" panose="02000703000000020004" pitchFamily="50" charset="-127"/>
-                </a:rPr>
-                <a:t>Task Status</a:t>
-              </a:r>
-              <a:endParaRPr lang="ko-KR" altLang="en-US" sz="1050" dirty="0">
-                <a:solidFill>
-                  <a:schemeClr val="tx1"/>
-                </a:solidFill>
-                <a:latin typeface="Pretendard SemiBold" panose="02000703000000020004" pitchFamily="50" charset="-127"/>
-                <a:ea typeface="Pretendard SemiBold" panose="02000703000000020004" pitchFamily="50" charset="-127"/>
-                <a:cs typeface="Pretendard SemiBold" panose="02000703000000020004" pitchFamily="50" charset="-127"/>
-              </a:endParaRPr>
-            </a:p>
-          </p:txBody>
-        </p:sp>
-        <p:cxnSp>
-          <p:nvCxnSpPr>
-            <p:cNvPr id="15" name="직선 화살표 연결선 14"/>
-            <p:cNvCxnSpPr/>
-            <p:nvPr/>
-          </p:nvCxnSpPr>
-          <p:spPr>
-            <a:xfrm>
-              <a:off x="4594714" y="2415076"/>
-              <a:ext cx="1008627" cy="0"/>
-            </a:xfrm>
-            <a:prstGeom prst="straightConnector1">
-              <a:avLst/>
-            </a:prstGeom>
-            <a:ln w="50800">
-              <a:tailEnd type="triangle"/>
-            </a:ln>
-          </p:spPr>
-          <p:style>
-            <a:lnRef idx="1">
-              <a:schemeClr val="dk1"/>
-            </a:lnRef>
-            <a:fillRef idx="0">
-              <a:schemeClr val="dk1"/>
-            </a:fillRef>
-            <a:effectRef idx="0">
-              <a:schemeClr val="dk1"/>
-            </a:effectRef>
-            <a:fontRef idx="minor">
-              <a:schemeClr val="tx1"/>
-            </a:fontRef>
-          </p:style>
-        </p:cxnSp>
-        <p:cxnSp>
-          <p:nvCxnSpPr>
-            <p:cNvPr id="16" name="직선 화살표 연결선 15"/>
-            <p:cNvCxnSpPr/>
-            <p:nvPr/>
-          </p:nvCxnSpPr>
-          <p:spPr>
-            <a:xfrm>
-              <a:off x="4594714" y="2535404"/>
-              <a:ext cx="1008627" cy="0"/>
-            </a:xfrm>
-            <a:prstGeom prst="straightConnector1">
-              <a:avLst/>
-            </a:prstGeom>
-            <a:ln w="50800">
-              <a:headEnd type="triangle"/>
-              <a:tailEnd type="none"/>
-            </a:ln>
-          </p:spPr>
-          <p:style>
-            <a:lnRef idx="1">
-              <a:schemeClr val="dk1"/>
-            </a:lnRef>
-            <a:fillRef idx="0">
-              <a:schemeClr val="dk1"/>
-            </a:fillRef>
-            <a:effectRef idx="0">
-              <a:schemeClr val="dk1"/>
-            </a:effectRef>
-            <a:fontRef idx="minor">
-              <a:schemeClr val="tx1"/>
-            </a:fontRef>
-          </p:style>
-        </p:cxnSp>
-        <p:cxnSp>
-          <p:nvCxnSpPr>
-            <p:cNvPr id="17" name="직선 화살표 연결선 16"/>
-            <p:cNvCxnSpPr/>
-            <p:nvPr/>
-          </p:nvCxnSpPr>
-          <p:spPr>
-            <a:xfrm flipH="1">
-              <a:off x="6331783" y="2688862"/>
-              <a:ext cx="2" cy="1339372"/>
-            </a:xfrm>
-            <a:prstGeom prst="straightConnector1">
-              <a:avLst/>
-            </a:prstGeom>
-            <a:ln w="50800">
-              <a:headEnd type="triangle" w="med" len="sm"/>
-              <a:tailEnd type="none"/>
-            </a:ln>
-          </p:spPr>
-          <p:style>
-            <a:lnRef idx="1">
-              <a:schemeClr val="dk1"/>
-            </a:lnRef>
-            <a:fillRef idx="0">
-              <a:schemeClr val="dk1"/>
-            </a:fillRef>
-            <a:effectRef idx="0">
-              <a:schemeClr val="dk1"/>
-            </a:effectRef>
-            <a:fontRef idx="minor">
-              <a:schemeClr val="tx1"/>
-            </a:fontRef>
-          </p:style>
-        </p:cxnSp>
-        <p:cxnSp>
-          <p:nvCxnSpPr>
-            <p:cNvPr id="18" name="직선 화살표 연결선 17"/>
-            <p:cNvCxnSpPr/>
-            <p:nvPr/>
-          </p:nvCxnSpPr>
-          <p:spPr>
-            <a:xfrm flipH="1">
-              <a:off x="7389919" y="2701897"/>
-              <a:ext cx="36" cy="1346872"/>
-            </a:xfrm>
-            <a:prstGeom prst="straightConnector1">
-              <a:avLst/>
-            </a:prstGeom>
-            <a:ln w="50800">
-              <a:headEnd type="triangle" w="med" len="sm"/>
-              <a:tailEnd type="none"/>
-            </a:ln>
-          </p:spPr>
-          <p:style>
-            <a:lnRef idx="1">
-              <a:schemeClr val="dk1"/>
-            </a:lnRef>
-            <a:fillRef idx="0">
-              <a:schemeClr val="dk1"/>
-            </a:fillRef>
-            <a:effectRef idx="0">
-              <a:schemeClr val="dk1"/>
-            </a:effectRef>
-            <a:fontRef idx="minor">
-              <a:schemeClr val="tx1"/>
-            </a:fontRef>
-          </p:style>
-        </p:cxnSp>
-        <p:sp>
-          <p:nvSpPr>
-            <p:cNvPr id="19" name="TextBox 18"/>
-            <p:cNvSpPr txBox="1"/>
-            <p:nvPr/>
-          </p:nvSpPr>
-          <p:spPr>
-            <a:xfrm>
-              <a:off x="4743713" y="2133033"/>
-              <a:ext cx="1098356" cy="253916"/>
-            </a:xfrm>
-            <a:prstGeom prst="rect">
-              <a:avLst/>
-            </a:prstGeom>
-            <a:noFill/>
-            <a:ln>
-              <a:noFill/>
-            </a:ln>
-          </p:spPr>
-          <p:txBody>
-            <a:bodyPr wrap="square" rtlCol="0">
-              <a:spAutoFit/>
-            </a:bodyPr>
-            <a:lstStyle/>
-            <a:p>
-              <a:r>
-                <a:rPr lang="ko-KR" altLang="en-US" sz="1050" dirty="0">
-                  <a:latin typeface="Pretendard SemiBold" panose="02000703000000020004" pitchFamily="50" charset="-127"/>
-                  <a:ea typeface="Pretendard SemiBold" panose="02000703000000020004" pitchFamily="50" charset="-127"/>
-                  <a:cs typeface="Pretendard SemiBold" panose="02000703000000020004" pitchFamily="50" charset="-127"/>
-                </a:rPr>
-                <a:t>조회 요청</a:t>
-              </a:r>
-            </a:p>
-          </p:txBody>
-        </p:sp>
-        <p:sp>
-          <p:nvSpPr>
-            <p:cNvPr id="20" name="TextBox 19"/>
-            <p:cNvSpPr txBox="1"/>
-            <p:nvPr/>
-          </p:nvSpPr>
-          <p:spPr>
-            <a:xfrm>
-              <a:off x="5306478" y="2963361"/>
-              <a:ext cx="1098356" cy="415498"/>
-            </a:xfrm>
-            <a:prstGeom prst="rect">
-              <a:avLst/>
-            </a:prstGeom>
-            <a:noFill/>
-            <a:ln>
-              <a:noFill/>
-            </a:ln>
-          </p:spPr>
-          <p:txBody>
-            <a:bodyPr wrap="square" rtlCol="0">
-              <a:spAutoFit/>
-            </a:bodyPr>
-            <a:lstStyle/>
-            <a:p>
-              <a:r>
-                <a:rPr lang="ko-KR" altLang="en-US" sz="1050" dirty="0">
-                  <a:latin typeface="Pretendard SemiBold" panose="02000703000000020004" pitchFamily="50" charset="-127"/>
-                  <a:ea typeface="Pretendard SemiBold" panose="02000703000000020004" pitchFamily="50" charset="-127"/>
-                  <a:cs typeface="Pretendard SemiBold" panose="02000703000000020004" pitchFamily="50" charset="-127"/>
-                </a:rPr>
-                <a:t>메타 정보와 상태 정보 조합</a:t>
-              </a:r>
-            </a:p>
-          </p:txBody>
-        </p:sp>
-      </p:grpSp>
-      <p:sp>
-        <p:nvSpPr>
-          <p:cNvPr id="21" name="CICD">
-            <a:extLst>
-              <a:ext uri="{FF2B5EF4-FFF2-40B4-BE49-F238E27FC236}">
-                <a16:creationId xmlns:a16="http://schemas.microsoft.com/office/drawing/2014/main" id="{762B2A58-EB2E-992F-01DA-15C50B338CB6}"/>
-              </a:ext>
-            </a:extLst>
-          </p:cNvPr>
-          <p:cNvSpPr/>
-          <p:nvPr/>
-        </p:nvSpPr>
-        <p:spPr>
-          <a:xfrm>
-            <a:off x="2406650" y="5476377"/>
-            <a:ext cx="7378700" cy="666750"/>
-          </a:xfrm>
-          <a:prstGeom prst="rect">
-            <a:avLst/>
-          </a:prstGeom>
-          <a:noFill/>
-          <a:ln/>
-        </p:spPr>
-        <p:txBody>
-          <a:bodyPr wrap="square" lIns="0" tIns="0" rIns="0" bIns="0" rtlCol="0" anchor="t"/>
-          <a:lstStyle/>
-          <a:p>
-            <a:pPr algn="ctr">
-              <a:lnSpc>
-                <a:spcPct val="150000"/>
-              </a:lnSpc>
-            </a:pPr>
-            <a:r>
-              <a:rPr lang="ko-KR" altLang="en-US" sz="1100" dirty="0">
-                <a:latin typeface="Pretendard SemiBold" panose="02000703000000020004" pitchFamily="50" charset="-127"/>
-                <a:ea typeface="Pretendard SemiBold" panose="02000703000000020004" pitchFamily="50" charset="-127"/>
-                <a:cs typeface="Pretendard SemiBold" panose="02000703000000020004" pitchFamily="50" charset="-127"/>
-              </a:rPr>
-              <a:t>패치 작업의 계획과 현재 패치 진행 상황을 별도의 대조 작업 없이 조회 가능</a:t>
-            </a:r>
-            <a:endParaRPr lang="en-US" sz="1100" dirty="0">
-              <a:latin typeface="Pretendard SemiBold" panose="02000703000000020004" pitchFamily="50" charset="-127"/>
-              <a:ea typeface="Pretendard SemiBold" panose="02000703000000020004" pitchFamily="50" charset="-127"/>
-              <a:cs typeface="Pretendard SemiBold" panose="02000703000000020004" pitchFamily="50" charset="-127"/>
-            </a:endParaRPr>
-          </a:p>
-        </p:txBody>
-      </p:sp>
-      <p:sp>
-        <p:nvSpPr>
-          <p:cNvPr id="24" name="Key Feature">
-            <a:extLst>
-              <a:ext uri="{FF2B5EF4-FFF2-40B4-BE49-F238E27FC236}">
-                <a16:creationId xmlns:a16="http://schemas.microsoft.com/office/drawing/2014/main" id="{047F6C8F-C776-7F0F-DAFE-29B85ACC1B0A}"/>
-              </a:ext>
-            </a:extLst>
-          </p:cNvPr>
-          <p:cNvSpPr/>
-          <p:nvPr/>
-        </p:nvSpPr>
-        <p:spPr>
-          <a:xfrm>
-            <a:off x="444499" y="285750"/>
-            <a:ext cx="4112163" cy="311150"/>
-          </a:xfrm>
-          <a:prstGeom prst="rect">
-            <a:avLst/>
-          </a:prstGeom>
-          <a:noFill/>
-          <a:ln/>
-        </p:spPr>
-        <p:txBody>
-          <a:bodyPr wrap="square" lIns="0" tIns="0" rIns="0" bIns="0" rtlCol="0" anchor="t"/>
-          <a:lstStyle/>
-          <a:p>
-            <a:pPr>
-              <a:lnSpc>
-                <a:spcPct val="108333"/>
-              </a:lnSpc>
-            </a:pPr>
-            <a:r>
-              <a:rPr lang="ko-KR" altLang="en-US" sz="1900" dirty="0">
-                <a:latin typeface="Pretendard SemiBold" panose="02000703000000020004" pitchFamily="50" charset="-127"/>
-                <a:ea typeface="Pretendard SemiBold" panose="02000703000000020004" pitchFamily="50" charset="-127"/>
-                <a:cs typeface="Pretendard SemiBold" panose="02000703000000020004" pitchFamily="50" charset="-127"/>
-              </a:rPr>
-              <a:t>패치 작업 조회</a:t>
-            </a:r>
-            <a:endParaRPr lang="en-US" altLang="ko-Kore-KR" sz="1900" dirty="0">
-              <a:latin typeface="Pretendard SemiBold" panose="02000703000000020004" pitchFamily="50" charset="-127"/>
-              <a:ea typeface="Pretendard SemiBold" panose="02000703000000020004" pitchFamily="50" charset="-127"/>
-              <a:cs typeface="Pretendard SemiBold" panose="02000703000000020004" pitchFamily="50" charset="-127"/>
-            </a:endParaRPr>
-          </a:p>
-        </p:txBody>
-      </p:sp>
-    </p:spTree>
-    <p:extLst>
-      <p:ext uri="{BB962C8B-B14F-4D97-AF65-F5344CB8AC3E}">
-        <p14:creationId xmlns:p14="http://schemas.microsoft.com/office/powerpoint/2010/main" val="3589141187"/>
-      </p:ext>
-    </p:extLst>
-  </p:cSld>
-  <p:clrMapOvr>
-    <a:masterClrMapping/>
-  </p:clrMapOvr>
-</p:sld>
-</file>
-
-<file path=ppt/slides/slide2.xml><?xml version="1.0" encoding="utf-8"?>
-<p:sld xmlns:a="http://schemas.openxmlformats.org/drawingml/2006/main" xmlns:r="http://schemas.openxmlformats.org/officeDocument/2006/relationships" xmlns:p="http://schemas.openxmlformats.org/presentationml/2006/main">
-  <p:cSld>
-    <p:spTree>
-      <p:nvGrpSpPr>
         <p:cNvPr id="1" name="">
           <a:extLst>
             <a:ext uri="{FF2B5EF4-FFF2-40B4-BE49-F238E27FC236}">
@@ -3090,15 +2062,15 @@
                 <a:ea typeface="Pretendard SemiBold" panose="02000703000000020004" pitchFamily="50" charset="-127"/>
                 <a:cs typeface="Pretendard SemiBold" panose="02000703000000020004" pitchFamily="50" charset="-127"/>
               </a:rPr>
-              <a:t>-</a:t>
-            </a:r>
-            <a:r>
-              <a:rPr lang="ko-KR" altLang="en-US" sz="1900" dirty="0">
+              <a:t>/</a:t>
+            </a:r>
+            <a:r>
+              <a:rPr lang="ko-KR" altLang="en-US" sz="1900">
                 <a:latin typeface="Pretendard SemiBold" panose="02000703000000020004" pitchFamily="50" charset="-127"/>
                 <a:ea typeface="Pretendard SemiBold" panose="02000703000000020004" pitchFamily="50" charset="-127"/>
                 <a:cs typeface="Pretendard SemiBold" panose="02000703000000020004" pitchFamily="50" charset="-127"/>
               </a:rPr>
-              <a:t>코드 갭 분석</a:t>
+              <a:t>리포트 생성</a:t>
             </a:r>
             <a:endParaRPr lang="en-US" altLang="ko-Kore-KR" sz="1900" dirty="0">
               <a:latin typeface="Pretendard SemiBold" panose="02000703000000020004" pitchFamily="50" charset="-127"/>

--- a/feature-slice/09b-document-report-generation/document-report-generation.pptx
+++ b/feature-slice/09b-document-report-generation/document-report-generation.pptx
@@ -203,7 +203,7 @@
           <a:p>
             <a:fld id="{1CFE36D4-B224-4D49-A73E-0BF1A210728E}" type="datetimeFigureOut">
               <a:rPr lang="ko-KR" altLang="en-US" smtClean="0"/>
-              <a:t>2026. 4. 13.</a:t>
+              <a:t>2026. 4. 16.</a:t>
             </a:fld>
             <a:endParaRPr lang="ko-KR" altLang="en-US"/>
           </a:p>
@@ -368,7 +368,7 @@
           <a:p>
             <a:fld id="{79F7304B-F283-4E41-A8FA-EB923FFBA2A0}" type="datetimeFigureOut">
               <a:rPr lang="ko-KR" altLang="en-US" smtClean="0"/>
-              <a:t>2026. 4. 13.</a:t>
+              <a:t>2026. 4. 16.</a:t>
             </a:fld>
             <a:endParaRPr lang="ko-KR" altLang="en-US"/>
           </a:p>
@@ -1459,7 +1459,7 @@
             <a:fld id="{A08F8EB2-BEDB-4375-BAD0-E61FA200F7A6}" type="datetimeFigureOut">
               <a:rPr lang="ko-KR" altLang="en-US" smtClean="0"/>
               <a:pPr/>
-              <a:t>2026. 4. 13.</a:t>
+              <a:t>2026. 4. 16.</a:t>
             </a:fld>
             <a:endParaRPr lang="ko-KR" altLang="en-US"/>
           </a:p>
@@ -1799,8 +1799,8 @@
         </p:nvSpPr>
         <p:spPr>
           <a:xfrm>
-            <a:off x="3643480" y="872066"/>
-            <a:ext cx="4365139" cy="5303405"/>
+            <a:off x="3643480" y="770465"/>
+            <a:ext cx="4365139" cy="4724056"/>
           </a:xfrm>
           <a:prstGeom prst="rect">
             <a:avLst/>
@@ -1866,7 +1866,7 @@
         </p:nvSpPr>
         <p:spPr>
           <a:xfrm>
-            <a:off x="1835496" y="2885088"/>
+            <a:off x="1835496" y="2783486"/>
             <a:ext cx="1468580" cy="1146592"/>
           </a:xfrm>
           <a:prstGeom prst="rect">
@@ -1933,7 +1933,7 @@
         </p:nvSpPr>
         <p:spPr>
           <a:xfrm>
-            <a:off x="118309" y="3306119"/>
+            <a:off x="118309" y="3204517"/>
             <a:ext cx="1325880" cy="566928"/>
           </a:xfrm>
           <a:prstGeom prst="roundRect">
@@ -2094,7 +2094,7 @@
         </p:nvSpPr>
         <p:spPr>
           <a:xfrm>
-            <a:off x="2045456" y="3307666"/>
+            <a:off x="2045456" y="3206064"/>
             <a:ext cx="1080820" cy="566928"/>
           </a:xfrm>
           <a:prstGeom prst="rect">
@@ -2195,7 +2195,7 @@
         </p:nvCxnSpPr>
         <p:spPr>
           <a:xfrm>
-            <a:off x="1444189" y="3589583"/>
+            <a:off x="1444189" y="3487981"/>
             <a:ext cx="601267" cy="1547"/>
           </a:xfrm>
           <a:prstGeom prst="straightConnector1">
@@ -2239,7 +2239,7 @@
         </p:nvSpPr>
         <p:spPr>
           <a:xfrm>
-            <a:off x="1626113" y="2213929"/>
+            <a:off x="1626113" y="2112327"/>
             <a:ext cx="877710" cy="215444"/>
           </a:xfrm>
           <a:prstGeom prst="rect">
@@ -2275,8 +2275,8 @@
         </p:nvSpPr>
         <p:spPr>
           <a:xfrm>
-            <a:off x="8078526" y="2269067"/>
-            <a:ext cx="3995165" cy="3906404"/>
+            <a:off x="8078526" y="2167465"/>
+            <a:ext cx="3995165" cy="3327055"/>
           </a:xfrm>
           <a:prstGeom prst="rect">
             <a:avLst/>
@@ -2342,7 +2342,7 @@
         </p:nvSpPr>
         <p:spPr>
           <a:xfrm>
-            <a:off x="9235806" y="877512"/>
+            <a:off x="9235806" y="775910"/>
             <a:ext cx="1600450" cy="1005840"/>
           </a:xfrm>
           <a:prstGeom prst="rect">
@@ -2406,7 +2406,7 @@
         </p:nvSpPr>
         <p:spPr>
           <a:xfrm>
-            <a:off x="9414405" y="1211071"/>
+            <a:off x="9414405" y="1109469"/>
             <a:ext cx="1243251" cy="530352"/>
           </a:xfrm>
           <a:prstGeom prst="rect">
@@ -2491,7 +2491,7 @@
         </p:nvSpPr>
         <p:spPr>
           <a:xfrm>
-            <a:off x="3695383" y="3193599"/>
+            <a:off x="3695383" y="3091997"/>
             <a:ext cx="1414168" cy="791967"/>
           </a:xfrm>
           <a:prstGeom prst="rect">
@@ -2640,7 +2640,7 @@
         </p:nvCxnSpPr>
         <p:spPr>
           <a:xfrm flipV="1">
-            <a:off x="3126276" y="3589583"/>
+            <a:off x="3126276" y="3487981"/>
             <a:ext cx="569107" cy="1547"/>
           </a:xfrm>
           <a:prstGeom prst="straightConnector1">
@@ -2684,7 +2684,7 @@
         </p:nvSpPr>
         <p:spPr>
           <a:xfrm>
-            <a:off x="2992700" y="3259945"/>
+            <a:off x="2992700" y="3158343"/>
             <a:ext cx="836258" cy="338554"/>
           </a:xfrm>
           <a:prstGeom prst="rect">
@@ -2728,7 +2728,7 @@
         </p:nvSpPr>
         <p:spPr>
           <a:xfrm>
-            <a:off x="3695383" y="2185416"/>
+            <a:off x="3695383" y="2083814"/>
             <a:ext cx="1414168" cy="491006"/>
           </a:xfrm>
           <a:prstGeom prst="rect">
@@ -2835,7 +2835,7 @@
         </p:nvCxnSpPr>
         <p:spPr>
           <a:xfrm flipV="1">
-            <a:off x="4402467" y="2676422"/>
+            <a:off x="4402467" y="2574820"/>
             <a:ext cx="0" cy="517177"/>
           </a:xfrm>
           <a:prstGeom prst="straightConnector1">
@@ -2879,7 +2879,7 @@
         </p:nvSpPr>
         <p:spPr>
           <a:xfrm>
-            <a:off x="4272533" y="2766726"/>
+            <a:off x="4272533" y="2665124"/>
             <a:ext cx="836258" cy="338554"/>
           </a:xfrm>
           <a:prstGeom prst="rect">
@@ -2927,7 +2927,7 @@
         </p:nvCxnSpPr>
         <p:spPr>
           <a:xfrm rot="10800000" flipV="1">
-            <a:off x="781249" y="2430919"/>
+            <a:off x="781249" y="2329317"/>
             <a:ext cx="2914134" cy="875200"/>
           </a:xfrm>
           <a:prstGeom prst="bentConnector2">
@@ -2972,7 +2972,7 @@
         </p:nvSpPr>
         <p:spPr>
           <a:xfrm>
-            <a:off x="1338372" y="3259945"/>
+            <a:off x="1338372" y="3158343"/>
             <a:ext cx="836258" cy="338554"/>
           </a:xfrm>
           <a:prstGeom prst="rect">
@@ -3016,7 +3016,7 @@
         </p:nvSpPr>
         <p:spPr>
           <a:xfrm>
-            <a:off x="6536981" y="1241889"/>
+            <a:off x="6536981" y="1140287"/>
             <a:ext cx="1414168" cy="491006"/>
           </a:xfrm>
           <a:prstGeom prst="rect">
@@ -3095,7 +3095,7 @@
         </p:nvSpPr>
         <p:spPr>
           <a:xfrm>
-            <a:off x="6536981" y="1800444"/>
+            <a:off x="6536981" y="1698842"/>
             <a:ext cx="1414168" cy="491006"/>
           </a:xfrm>
           <a:prstGeom prst="rect">
@@ -3178,7 +3178,7 @@
         </p:nvCxnSpPr>
         <p:spPr>
           <a:xfrm flipV="1">
-            <a:off x="7951149" y="1476247"/>
+            <a:off x="7951149" y="1374645"/>
             <a:ext cx="1463256" cy="11145"/>
           </a:xfrm>
           <a:prstGeom prst="straightConnector1">
@@ -3227,7 +3227,7 @@
         </p:nvCxnSpPr>
         <p:spPr>
           <a:xfrm flipV="1">
-            <a:off x="7951149" y="1476247"/>
+            <a:off x="7951149" y="1374645"/>
             <a:ext cx="1463256" cy="569700"/>
           </a:xfrm>
           <a:prstGeom prst="bentConnector3">
@@ -3274,7 +3274,7 @@
         </p:nvSpPr>
         <p:spPr>
           <a:xfrm>
-            <a:off x="7956857" y="1261878"/>
+            <a:off x="7956857" y="1160276"/>
             <a:ext cx="877710" cy="215444"/>
           </a:xfrm>
           <a:prstGeom prst="rect">
@@ -3310,7 +3310,7 @@
         </p:nvSpPr>
         <p:spPr>
           <a:xfrm>
-            <a:off x="7952361" y="1827844"/>
+            <a:off x="7952361" y="1726242"/>
             <a:ext cx="993234" cy="215444"/>
           </a:xfrm>
           <a:prstGeom prst="rect">
@@ -3357,7 +3357,7 @@
         </p:nvCxnSpPr>
         <p:spPr>
           <a:xfrm rot="5400000" flipH="1" flipV="1">
-            <a:off x="5272394" y="2041533"/>
+            <a:off x="5272394" y="1939931"/>
             <a:ext cx="1818727" cy="710447"/>
           </a:xfrm>
           <a:prstGeom prst="bentConnector2">
@@ -3404,7 +3404,7 @@
         </p:nvCxnSpPr>
         <p:spPr>
           <a:xfrm flipV="1">
-            <a:off x="5109551" y="2045947"/>
+            <a:off x="5109551" y="1944345"/>
             <a:ext cx="1427430" cy="1260172"/>
           </a:xfrm>
           <a:prstGeom prst="bentConnector3">
@@ -3450,7 +3450,7 @@
         </p:nvSpPr>
         <p:spPr>
           <a:xfrm>
-            <a:off x="5659271" y="1271707"/>
+            <a:off x="5659271" y="1170105"/>
             <a:ext cx="877710" cy="215444"/>
           </a:xfrm>
           <a:prstGeom prst="rect">
@@ -3486,7 +3486,7 @@
         </p:nvSpPr>
         <p:spPr>
           <a:xfrm>
-            <a:off x="5742903" y="1708629"/>
+            <a:off x="5742903" y="1607027"/>
             <a:ext cx="877710" cy="338554"/>
           </a:xfrm>
           <a:prstGeom prst="rect">
@@ -3538,7 +3538,7 @@
         </p:nvSpPr>
         <p:spPr>
           <a:xfrm>
-            <a:off x="6597816" y="4439660"/>
+            <a:off x="6597816" y="3787718"/>
             <a:ext cx="1280593" cy="680651"/>
           </a:xfrm>
           <a:prstGeom prst="rect">
@@ -3665,7 +3665,7 @@
         </p:nvSpPr>
         <p:spPr>
           <a:xfrm>
-            <a:off x="6597816" y="5297376"/>
+            <a:off x="6597816" y="4645434"/>
             <a:ext cx="1280593" cy="680650"/>
           </a:xfrm>
           <a:prstGeom prst="rect">
@@ -3777,12 +3777,12 @@
         </p:nvCxnSpPr>
         <p:spPr>
           <a:xfrm>
-            <a:off x="4823460" y="3983798"/>
-            <a:ext cx="1774356" cy="796188"/>
+            <a:off x="4769624" y="3874605"/>
+            <a:ext cx="1828192" cy="253439"/>
           </a:xfrm>
           <a:prstGeom prst="bentConnector3">
             <a:avLst>
-              <a:gd name="adj1" fmla="val 184"/>
+              <a:gd name="adj1" fmla="val -17"/>
             </a:avLst>
           </a:prstGeom>
           <a:ln w="3175">
@@ -3823,7 +3823,7 @@
         </p:nvSpPr>
         <p:spPr>
           <a:xfrm>
-            <a:off x="5222036" y="4320090"/>
+            <a:off x="5228013" y="3677181"/>
             <a:ext cx="927182" cy="461665"/>
           </a:xfrm>
           <a:prstGeom prst="rect">
@@ -3877,12 +3877,12 @@
         </p:nvCxnSpPr>
         <p:spPr>
           <a:xfrm>
-            <a:off x="4596867" y="3983798"/>
-            <a:ext cx="2000948" cy="1498149"/>
+            <a:off x="4137534" y="3883964"/>
+            <a:ext cx="2460281" cy="1270927"/>
           </a:xfrm>
           <a:prstGeom prst="bentConnector3">
             <a:avLst>
-              <a:gd name="adj1" fmla="val 113"/>
+              <a:gd name="adj1" fmla="val 101"/>
             </a:avLst>
           </a:prstGeom>
           <a:ln w="3175">
@@ -3927,8 +3927,8 @@
         </p:nvCxnSpPr>
         <p:spPr>
           <a:xfrm rot="10800000">
-            <a:off x="4402468" y="3985567"/>
-            <a:ext cx="2195349" cy="1652135"/>
+            <a:off x="4402468" y="3883965"/>
+            <a:ext cx="2195349" cy="1101795"/>
           </a:xfrm>
           <a:prstGeom prst="bentConnector2">
             <a:avLst/>
@@ -3971,7 +3971,7 @@
         </p:nvSpPr>
         <p:spPr>
           <a:xfrm>
-            <a:off x="5187141" y="5143393"/>
+            <a:off x="5174258" y="4654659"/>
             <a:ext cx="1057133" cy="338554"/>
           </a:xfrm>
           <a:prstGeom prst="rect">
@@ -4027,7 +4027,7 @@
         </p:nvSpPr>
         <p:spPr>
           <a:xfrm>
-            <a:off x="5187141" y="5639472"/>
+            <a:off x="5163037" y="5163020"/>
             <a:ext cx="1057133" cy="338554"/>
           </a:xfrm>
           <a:prstGeom prst="rect">
@@ -4076,7 +4076,7 @@
         </p:nvSpPr>
         <p:spPr>
           <a:xfrm>
-            <a:off x="8175882" y="3264060"/>
+            <a:off x="8175882" y="3162458"/>
             <a:ext cx="1686538" cy="680651"/>
           </a:xfrm>
           <a:prstGeom prst="rect">
@@ -4251,7 +4251,7 @@
         </p:nvSpPr>
         <p:spPr>
           <a:xfrm>
-            <a:off x="10484698" y="2626068"/>
+            <a:off x="10484698" y="2524466"/>
             <a:ext cx="1499294" cy="617883"/>
           </a:xfrm>
           <a:prstGeom prst="can">
@@ -4384,7 +4384,7 @@
         </p:nvSpPr>
         <p:spPr>
           <a:xfrm>
-            <a:off x="10484698" y="3944711"/>
+            <a:off x="10484698" y="3643320"/>
             <a:ext cx="1499294" cy="617883"/>
           </a:xfrm>
           <a:prstGeom prst="can">
@@ -4511,7 +4511,7 @@
         </p:nvSpPr>
         <p:spPr>
           <a:xfrm>
-            <a:off x="10484698" y="5368051"/>
+            <a:off x="10484698" y="4742063"/>
             <a:ext cx="1499294" cy="617883"/>
           </a:xfrm>
           <a:prstGeom prst="can">
@@ -4622,7 +4622,7 @@
         </p:nvCxnSpPr>
         <p:spPr>
           <a:xfrm>
-            <a:off x="5109551" y="3466567"/>
+            <a:off x="5109551" y="3364965"/>
             <a:ext cx="3066331" cy="0"/>
           </a:xfrm>
           <a:prstGeom prst="straightConnector1">
@@ -4666,7 +4666,7 @@
         </p:nvSpPr>
         <p:spPr>
           <a:xfrm>
-            <a:off x="6057717" y="3006995"/>
+            <a:off x="6057717" y="2905393"/>
             <a:ext cx="1125790" cy="461665"/>
           </a:xfrm>
           <a:prstGeom prst="rect">
@@ -4728,7 +4728,7 @@
         </p:nvCxnSpPr>
         <p:spPr>
           <a:xfrm>
-            <a:off x="5109551" y="3756127"/>
+            <a:off x="5109551" y="3654525"/>
             <a:ext cx="3066331" cy="0"/>
           </a:xfrm>
           <a:prstGeom prst="straightConnector1">
@@ -4772,7 +4772,7 @@
         </p:nvSpPr>
         <p:spPr>
           <a:xfrm>
-            <a:off x="5597341" y="3761357"/>
+            <a:off x="5591748" y="3438197"/>
             <a:ext cx="1890466" cy="215444"/>
           </a:xfrm>
           <a:prstGeom prst="rect">
@@ -4844,7 +4844,7 @@
         </p:nvCxnSpPr>
         <p:spPr>
           <a:xfrm rot="5400000" flipH="1" flipV="1">
-            <a:off x="9587399" y="2366762"/>
+            <a:off x="9587399" y="2265160"/>
             <a:ext cx="329050" cy="1465547"/>
           </a:xfrm>
           <a:prstGeom prst="bentConnector2">
@@ -4892,8 +4892,8 @@
         </p:nvCxnSpPr>
         <p:spPr>
           <a:xfrm rot="16200000" flipH="1">
-            <a:off x="9597453" y="3366408"/>
-            <a:ext cx="308942" cy="1465547"/>
+            <a:off x="9697348" y="3164911"/>
+            <a:ext cx="109153" cy="1465547"/>
           </a:xfrm>
           <a:prstGeom prst="bentConnector2">
             <a:avLst/>
@@ -4940,8 +4940,8 @@
         </p:nvCxnSpPr>
         <p:spPr>
           <a:xfrm rot="16200000" flipH="1">
-            <a:off x="8885783" y="4078078"/>
-            <a:ext cx="1732282" cy="1465547"/>
+            <a:off x="9147976" y="3714283"/>
+            <a:ext cx="1207896" cy="1465547"/>
           </a:xfrm>
           <a:prstGeom prst="bentConnector2">
             <a:avLst/>
@@ -4984,7 +4984,7 @@
         </p:nvSpPr>
         <p:spPr>
           <a:xfrm>
-            <a:off x="9052651" y="2719565"/>
+            <a:off x="9052651" y="2617963"/>
             <a:ext cx="1398547" cy="215444"/>
           </a:xfrm>
           <a:prstGeom prst="rect">
@@ -5036,7 +5036,7 @@
         </p:nvSpPr>
         <p:spPr>
           <a:xfrm>
-            <a:off x="9029238" y="5461548"/>
+            <a:off x="9016244" y="5064103"/>
             <a:ext cx="1398547" cy="215444"/>
           </a:xfrm>
           <a:prstGeom prst="rect">
@@ -5088,7 +5088,7 @@
         </p:nvSpPr>
         <p:spPr>
           <a:xfrm>
-            <a:off x="9029237" y="4264099"/>
+            <a:off x="9021853" y="3971843"/>
             <a:ext cx="1398547" cy="215444"/>
           </a:xfrm>
           <a:prstGeom prst="rect">
@@ -5115,6 +5115,78 @@
               <a:rPr kumimoji="1" lang="ko-KR" altLang="en-US" sz="800" dirty="0"/>
               <a:t> 리포트 영구 저장</a:t>
             </a:r>
+          </a:p>
+        </p:txBody>
+      </p:sp>
+      <p:sp>
+        <p:nvSpPr>
+          <p:cNvPr id="16" name="직사각형 15">
+            <a:extLst>
+              <a:ext uri="{FF2B5EF4-FFF2-40B4-BE49-F238E27FC236}">
+                <a16:creationId xmlns:a16="http://schemas.microsoft.com/office/drawing/2014/main" id="{E27E64E0-AAE6-A655-82E5-E5E619B62716}"/>
+              </a:ext>
+            </a:extLst>
+          </p:cNvPr>
+          <p:cNvSpPr/>
+          <p:nvPr/>
+        </p:nvSpPr>
+        <p:spPr>
+          <a:xfrm>
+            <a:off x="1224179" y="5748531"/>
+            <a:ext cx="9743641" cy="307777"/>
+          </a:xfrm>
+          <a:prstGeom prst="rect">
+            <a:avLst/>
+          </a:prstGeom>
+        </p:spPr>
+        <p:txBody>
+          <a:bodyPr wrap="square">
+            <a:spAutoFit/>
+          </a:bodyPr>
+          <a:lstStyle/>
+          <a:p>
+            <a:pPr algn="ctr"/>
+            <a:r>
+              <a:rPr lang="en" altLang="ko-KR" sz="1400" b="1" dirty="0"/>
+              <a:t>AI </a:t>
+            </a:r>
+            <a:r>
+              <a:rPr lang="ko-KR" altLang="en-US" sz="1400" b="1" dirty="0" err="1"/>
+              <a:t>초안→업무</a:t>
+            </a:r>
+            <a:r>
+              <a:rPr lang="ko-KR" altLang="en-US" sz="1400" b="1" dirty="0"/>
+              <a:t> 언어 </a:t>
+            </a:r>
+            <a:r>
+              <a:rPr lang="ko-KR" altLang="en-US" sz="1400" b="1" dirty="0" err="1"/>
+              <a:t>변환→포맷팅→승인</a:t>
+            </a:r>
+            <a:r>
+              <a:rPr lang="en-US" altLang="ko-KR" sz="1400" b="1" dirty="0"/>
+              <a:t>,</a:t>
+            </a:r>
+            <a:r>
+              <a:rPr lang="ko-KR" altLang="en-US" sz="1400" b="1" dirty="0"/>
+              <a:t> 버전 </a:t>
+            </a:r>
+            <a:r>
+              <a:rPr lang="ko-KR" altLang="en-US" sz="1400" b="1" dirty="0" err="1"/>
+              <a:t>확정→발행</a:t>
+            </a:r>
+            <a:r>
+              <a:rPr lang="ko-KR" altLang="en-US" sz="1400" b="1" dirty="0"/>
+              <a:t> 파이프라인으로 자동화한 문서</a:t>
+            </a:r>
+            <a:r>
+              <a:rPr lang="en-US" altLang="ko-KR" sz="1400" b="1" dirty="0"/>
+              <a:t>/</a:t>
+            </a:r>
+            <a:r>
+              <a:rPr lang="ko-KR" altLang="en-US" sz="1400" b="1" dirty="0"/>
+              <a:t>리포트 생성 기능 제공</a:t>
+            </a:r>
+            <a:endParaRPr lang="en-US" altLang="ko-KR" sz="1400" b="1" dirty="0"/>
           </a:p>
         </p:txBody>
       </p:sp>
